--- a/dist/초2/체육·보건·안전/놀이와협력/초2_체육·보건·안전_놀이와협력_01_규칙있는놀이.pptx
+++ b/dist/초2/체육·보건·안전/놀이와협력/초2_체육·보건·안전_놀이와협력_01_규칙있는놀이.pptx
@@ -114,34 +114,34 @@
   <p:extLst>
     <p:ext uri="{521415D9-36F7-43E2-AB2F-B90AF26B5E84}">
       <p14:sectionLst xmlns:p14="http://schemas.microsoft.com/office/powerpoint/2010/main">
-        <p14:section name="도입" id="{b2b37f51-566a-579b-97bf-0783761720b6}">
+        <p14:section name="도입" id="{9ea397d1-74c3-7447-1fbd-a3775bd11939}">
           <p14:sldIdLst>
             <p14:sldId id="256"/>
             <p14:sldId id="257"/>
           </p14:sldIdLst>
         </p14:section>
-        <p14:section name="개념" id="{0066852f-7845-dfa2-df6c-1eb194c0722e}">
+        <p14:section name="개념" id="{bba8fc78-7e48-8084-7548-ed5fa08d49b1}">
           <p14:sldIdLst>
             <p14:sldId id="258"/>
           </p14:sldIdLst>
         </p14:section>
-        <p14:section name="연습" id="{2804ab85-1204-1bf7-3124-be4bc3d2db37}">
+        <p14:section name="연습" id="{453dcf8b-5a82-35f6-19ae-98e321e760ec}">
           <p14:sldIdLst>
             <p14:sldId id="259"/>
             <p14:sldId id="260"/>
           </p14:sldIdLst>
         </p14:section>
-        <p14:section name="확인" id="{b75d61c3-b00d-ce96-c4c8-529b066dd9fc}">
+        <p14:section name="확인" id="{33754681-c0e0-5524-ba72-93a4558f70de}">
           <p14:sldIdLst>
             <p14:sldId id="261"/>
           </p14:sldIdLst>
         </p14:section>
-        <p14:section name="정리" id="{ea7a4550-c07f-43d5-5111-339978de32bd}">
+        <p14:section name="정리" id="{fade181d-35d9-ae95-078b-11cdd1cde501}">
           <p14:sldIdLst>
             <p14:sldId id="262"/>
           </p14:sldIdLst>
         </p14:section>
-        <p14:section name="보충" id="{e8263a35-ddb7-edb4-490c-dc0157a6941f}">
+        <p14:section name="보충" id="{8820bcae-5fd3-c9c1-2561-23376f3ad2bc}">
           <p14:sldIdLst>
             <p14:sldId id="263"/>
           </p14:sldIdLst>
